--- a/neposielat!/MKR_meteo_prezentacia.pptx
+++ b/neposielat!/MKR_meteo_prezentacia.pptx
@@ -5707,7 +5707,7 @@
                   <a:srgbClr val="1A237E"/>
                 </a:solidFill>
               </a:rPr>
-              <a:t>• Jaro/jeseň: </a:t>
+              <a:t>• Jar/jeseň: </a:t>
             </a:r>
             <a:r>
               <a:rPr lang="sk-SK" sz="1400" dirty="0"/>
@@ -7087,7 +7087,15 @@
             </a:r>
             <a:r>
               <a:rPr sz="900" b="1" dirty="0"/>
-              <a:t> — </a:t>
+              <a:t> </a:t>
+            </a:r>
+            <a:r>
+              <a:rPr lang="sk-SK" sz="900" b="1"/>
+              <a:t>-</a:t>
+            </a:r>
+            <a:r>
+              <a:rPr sz="900" b="1"/>
+              <a:t> </a:t>
             </a:r>
             <a:r>
               <a:rPr sz="900" b="1" dirty="0" err="1"/>
@@ -7520,7 +7528,23 @@
                   <a:srgbClr val="222222"/>
                 </a:solidFill>
               </a:rPr>
-              <a:t> (0.74 %), 151 </a:t>
+              <a:t> (0.74 %), 1</a:t>
+            </a:r>
+            <a:r>
+              <a:rPr lang="sk-SK" sz="1600" dirty="0">
+                <a:solidFill>
+                  <a:srgbClr val="222222"/>
+                </a:solidFill>
+              </a:rPr>
+              <a:t>22</a:t>
+            </a:r>
+            <a:r>
+              <a:rPr sz="1600" dirty="0">
+                <a:solidFill>
+                  <a:srgbClr val="222222"/>
+                </a:solidFill>
+              </a:rPr>
+              <a:t> </a:t>
             </a:r>
             <a:r>
               <a:rPr sz="1600" dirty="0" err="1">
@@ -7552,8 +7576,21 @@
                   <a:srgbClr val="222222"/>
                 </a:solidFill>
               </a:rPr>
-              <a:t> 12</a:t>
-            </a:r>
+              <a:t> 1</a:t>
+            </a:r>
+            <a:r>
+              <a:rPr lang="sk-SK" sz="1600" dirty="0">
+                <a:solidFill>
+                  <a:srgbClr val="222222"/>
+                </a:solidFill>
+              </a:rPr>
+              <a:t>7</a:t>
+            </a:r>
+            <a:endParaRPr sz="1600" dirty="0">
+              <a:solidFill>
+                <a:srgbClr val="222222"/>
+              </a:solidFill>
+            </a:endParaRPr>
           </a:p>
           <a:p>
             <a:pPr>
@@ -12606,40 +12643,6 @@
                 <a:srgbClr val="FFFFFF"/>
               </a:solidFill>
             </a:endParaRPr>
-          </a:p>
-        </p:txBody>
-      </p:sp>
-      <p:sp>
-        <p:nvSpPr>
-          <p:cNvPr id="5" name="TextBox 4"/>
-          <p:cNvSpPr txBox="1"/>
-          <p:nvPr/>
-        </p:nvSpPr>
-        <p:spPr>
-          <a:xfrm>
-            <a:off x="10607040" y="320040"/>
-            <a:ext cx="1463040" cy="365760"/>
-          </a:xfrm>
-          <a:prstGeom prst="rect">
-            <a:avLst/>
-          </a:prstGeom>
-          <a:noFill/>
-        </p:spPr>
-        <p:txBody>
-          <a:bodyPr wrap="none">
-            <a:spAutoFit/>
-          </a:bodyPr>
-          <a:lstStyle/>
-          <a:p>
-            <a:pPr algn="r"/>
-            <a:r>
-              <a:rPr sz="1000">
-                <a:solidFill>
-                  <a:srgbClr val="C5CAE9"/>
-                </a:solidFill>
-              </a:rPr>
-              <a:t>⏱ 45 s</a:t>
-            </a:r>
           </a:p>
         </p:txBody>
       </p:sp>
@@ -16078,7 +16081,7 @@
         <p:spPr>
           <a:xfrm>
             <a:off x="6324445" y="1774116"/>
-            <a:ext cx="5410047" cy="3860031"/>
+            <a:ext cx="5410047" cy="4455066"/>
           </a:xfrm>
           <a:prstGeom prst="rect">
             <a:avLst/>
@@ -16207,8 +16210,21 @@
                   <a:srgbClr val="555555"/>
                 </a:solidFill>
               </a:rPr>
-              <a:t>   151</a:t>
-            </a:r>
+              <a:t>   1</a:t>
+            </a:r>
+            <a:r>
+              <a:rPr lang="sk-SK" sz="1600" i="1" dirty="0">
+                <a:solidFill>
+                  <a:srgbClr val="555555"/>
+                </a:solidFill>
+              </a:rPr>
+              <a:t>22</a:t>
+            </a:r>
+            <a:endParaRPr sz="1600" i="1" dirty="0">
+              <a:solidFill>
+                <a:srgbClr val="555555"/>
+              </a:solidFill>
+            </a:endParaRPr>
           </a:p>
           <a:p>
             <a:pPr>
@@ -16281,7 +16297,23 @@
                   <a:srgbClr val="555555"/>
                 </a:solidFill>
               </a:rPr>
-              <a:t>   12 </a:t>
+              <a:t>   1</a:t>
+            </a:r>
+            <a:r>
+              <a:rPr lang="sk-SK" sz="1600" i="1" dirty="0">
+                <a:solidFill>
+                  <a:srgbClr val="555555"/>
+                </a:solidFill>
+              </a:rPr>
+              <a:t>7</a:t>
+            </a:r>
+            <a:r>
+              <a:rPr sz="1600" i="1" dirty="0">
+                <a:solidFill>
+                  <a:srgbClr val="555555"/>
+                </a:solidFill>
+              </a:rPr>
+              <a:t> </a:t>
             </a:r>
             <a:r>
               <a:rPr sz="1600" i="1" dirty="0" err="1">
@@ -16316,28 +16348,12 @@
               </a:spcAft>
             </a:pPr>
             <a:r>
-              <a:rPr sz="1600" b="1" dirty="0">
-                <a:solidFill>
-                  <a:srgbClr val="222222"/>
-                </a:solidFill>
-              </a:rPr>
-              <a:t>• </a:t>
-            </a:r>
-            <a:r>
-              <a:rPr sz="1600" b="1" dirty="0" err="1">
-                <a:solidFill>
-                  <a:srgbClr val="222222"/>
-                </a:solidFill>
-              </a:rPr>
-              <a:t>Distribúcia</a:t>
-            </a:r>
-            <a:r>
-              <a:rPr sz="1600" b="1" dirty="0">
-                <a:solidFill>
-                  <a:srgbClr val="222222"/>
-                </a:solidFill>
-              </a:rPr>
-              <a:t>:</a:t>
+              <a:rPr lang="sk-SK" sz="1600" b="1" dirty="0">
+                <a:solidFill>
+                  <a:srgbClr val="222222"/>
+                </a:solidFill>
+              </a:rPr>
+              <a:t>• Dĺžka skupiny = 1:</a:t>
             </a:r>
           </a:p>
           <a:p>
@@ -16347,12 +16363,12 @@
               </a:spcAft>
             </a:pPr>
             <a:r>
-              <a:rPr sz="1600" i="1" dirty="0">
+              <a:rPr lang="sk-SK" sz="1600" i="1" dirty="0">
                 <a:solidFill>
                   <a:srgbClr val="555555"/>
                 </a:solidFill>
               </a:rPr>
-              <a:t>   137×1, 7×2, 3×3, 1×4, 1×5, 1×8, 1×12</a:t>
+              <a:t>   91 prípadov</a:t>
             </a:r>
           </a:p>
           <a:p>
@@ -16361,7 +16377,7 @@
                 <a:spcPts val="100"/>
               </a:spcAft>
             </a:pPr>
-            <a:endParaRPr lang="en-US" sz="1600" b="1" dirty="0">
+            <a:endParaRPr lang="sk-SK" sz="1600" b="1" dirty="0">
               <a:solidFill>
                 <a:srgbClr val="222222"/>
               </a:solidFill>
@@ -16379,7 +16395,23 @@
                   <a:srgbClr val="222222"/>
                 </a:solidFill>
               </a:rPr>
-              <a:t>• 91 % </a:t>
+              <a:t>• </a:t>
+            </a:r>
+            <a:r>
+              <a:rPr lang="sk-SK" sz="1600" b="1" dirty="0">
+                <a:solidFill>
+                  <a:srgbClr val="222222"/>
+                </a:solidFill>
+              </a:rPr>
+              <a:t>74,6</a:t>
+            </a:r>
+            <a:r>
+              <a:rPr sz="1600" b="1" dirty="0">
+                <a:solidFill>
+                  <a:srgbClr val="222222"/>
+                </a:solidFill>
+              </a:rPr>
+              <a:t> % </a:t>
             </a:r>
             <a:r>
               <a:rPr sz="1600" b="1" dirty="0" err="1">
@@ -16468,6 +16500,30 @@
               </a:rPr>
               <a:t>chyby</a:t>
             </a:r>
+            <a:endParaRPr lang="sk-SK" sz="1600" i="1" dirty="0">
+              <a:solidFill>
+                <a:srgbClr val="555555"/>
+              </a:solidFill>
+            </a:endParaRPr>
+          </a:p>
+          <a:p>
+            <a:pPr>
+              <a:spcAft>
+                <a:spcPts val="400"/>
+              </a:spcAft>
+            </a:pPr>
+            <a:endParaRPr lang="sk-SK" sz="1600" i="1" dirty="0">
+              <a:solidFill>
+                <a:srgbClr val="555555"/>
+              </a:solidFill>
+            </a:endParaRPr>
+          </a:p>
+          <a:p>
+            <a:pPr>
+              <a:spcAft>
+                <a:spcPts val="400"/>
+              </a:spcAft>
+            </a:pPr>
             <a:endParaRPr sz="1600" i="1" dirty="0">
               <a:solidFill>
                 <a:srgbClr val="555555"/>
